--- a/decks/geog-africa/geog-africa_ch4_people-of-africa.pptx
+++ b/decks/geog-africa/geog-africa_ch4_people-of-africa.pptx
@@ -124,29 +124,29 @@
   <p:extLst>
     <p:ext uri="{521415D9-36F7-43E2-AB2F-B90AF26B5E84}">
       <p14:sectionLst xmlns:p14="http://schemas.microsoft.com/office/powerpoint/2010/main">
-        <p14:section name="Opening" id="{ee11247f-bf74-8e08-97c9-0901802e64ac}">
+        <p14:section name="Opening" id="{848cfa86-cd3e-eb45-88ce-21aaacc8fde6}">
           <p14:sldIdLst>
             <p14:sldId id="256"/>
           </p14:sldIdLst>
         </p14:section>
-        <p14:section name="Gate" id="{663e1f88-0fd2-21a5-e7d9-40e30fefb074}">
+        <p14:section name="Gate" id="{1db75033-8270-0a35-4f41-544b1ef4c387}">
           <p14:sldIdLst>
             <p14:sldId id="257"/>
             <p14:sldId id="258"/>
           </p14:sldIdLst>
         </p14:section>
-        <p14:section name="Pre-teach" id="{9a9c77ad-acbd-f4ec-78a3-616044900c5c}">
+        <p14:section name="Pre-teach" id="{2b33f2d5-f5c9-572f-e5ae-ad9598022f24}">
           <p14:sldIdLst>
             <p14:sldId id="259"/>
           </p14:sldIdLst>
         </p14:section>
-        <p14:section name="Read-along" id="{d2ba022c-53f8-3c81-7ec6-6cafb6d167d9}">
+        <p14:section name="Read-along" id="{24bb8d60-ebbd-2797-26e0-f3c2f35e2438}">
           <p14:sldIdLst>
             <p14:sldId id="260"/>
             <p14:sldId id="261"/>
           </p14:sldIdLst>
         </p14:section>
-        <p14:section name="Teach" id="{a85db552-d27d-9c0c-e28c-0d6ab0e0738c}">
+        <p14:section name="Teach" id="{8ae7faf4-f1e6-45e6-c0fb-75320a70bb76}">
           <p14:sldIdLst>
             <p14:sldId id="262"/>
             <p14:sldId id="263"/>
@@ -154,19 +154,19 @@
             <p14:sldId id="265"/>
           </p14:sldIdLst>
         </p14:section>
-        <p14:section name="Routes" id="{baa3480e-0c5d-9234-7ffa-3788e121da9a}">
+        <p14:section name="Routes" id="{dfc74771-2b1d-f6de-9cc5-37b752674a5f}">
           <p14:sldIdLst>
             <p14:sldId id="266"/>
             <p14:sldId id="267"/>
             <p14:sldId id="268"/>
           </p14:sldIdLst>
         </p14:section>
-        <p14:section name="Close" id="{f56b4de5-a2b3-a45e-867d-83603d9ca7d9}">
+        <p14:section name="Close" id="{4c86110f-9eee-60f3-fa8c-58778afde303}">
           <p14:sldIdLst>
             <p14:sldId id="269"/>
           </p14:sldIdLst>
         </p14:section>
-        <p14:section name="Answers" id="{c1c5d758-489c-07d6-6b52-20a3c5f1bfb2}">
+        <p14:section name="Answers" id="{d20e647d-39b0-9b20-b18f-dff4c8a8224c}">
           <p14:sldIdLst>
             <p14:sldId id="270"/>
             <p14:sldId id="271"/>
